--- a/classes/parte-2-deep-learning/132-localizacion-deteccion-yolo-faster-r-cnn-segmentacion-semantica/clase-132-localizacion-deteccion-yolo-faster-r-cnn-segmentacion-semantica-presentacion.pptx
+++ b/classes/parte-2-deep-learning/132-localizacion-deteccion-yolo-faster-r-cnn-segmentacion-semantica/clase-132-localizacion-deteccion-yolo-faster-r-cnn-segmentacion-semantica-presentacion.pptx
@@ -4823,7 +4823,7 @@
                 </a:solidFill>
                 <a:latin typeface="Segoe UI"/>
               </a:rPr>
-              <a:t>Primer bloque ejecutable del notebook.</a:t>
+              <a:t>Dos convenciones habituales: (x1, y1, x2, y2) (esquinas) y (cx, cy, w, h) (centro + tamaño). Convertir entre ambas es rutina.</a:t>
             </a:r>
           </a:p>
         </p:txBody>
@@ -4910,7 +4910,216 @@
                 </a:solidFill>
                 <a:latin typeface="Courier New"/>
               </a:rPr>
-              <a:t># Imports y configuración inicial</a:t>
+              <a:t>import numpy as np</a:t>
+            </a:r>
+          </a:p>
+          <a:p>
+            <a:pPr>
+              <a:defRPr sz="1200" b="0">
+                <a:solidFill>
+                  <a:srgbClr val="F8FAFC"/>
+                </a:solidFill>
+                <a:latin typeface="Courier New"/>
+              </a:defRPr>
+            </a:pPr>
+            <a:r>
+              <a:rPr sz="1200" b="0">
+                <a:solidFill>
+                  <a:srgbClr val="F8FAFC"/>
+                </a:solidFill>
+                <a:latin typeface="Courier New"/>
+              </a:rPr>
+              <a:t>np.random.seed(42)</a:t>
+            </a:r>
+          </a:p>
+          <a:p>
+            <a:pPr>
+              <a:defRPr sz="1200" b="0">
+                <a:solidFill>
+                  <a:srgbClr val="F8FAFC"/>
+                </a:solidFill>
+                <a:latin typeface="Courier New"/>
+              </a:defRPr>
+            </a:pPr>
+            <a:r>
+              <a:rPr sz="1200" b="0">
+                <a:solidFill>
+                  <a:srgbClr val="F8FAFC"/>
+                </a:solidFill>
+                <a:latin typeface="Courier New"/>
+              </a:rPr>
+              <a:t> </a:t>
+            </a:r>
+          </a:p>
+          <a:p>
+            <a:pPr>
+              <a:defRPr sz="1200" b="0">
+                <a:solidFill>
+                  <a:srgbClr val="F8FAFC"/>
+                </a:solidFill>
+                <a:latin typeface="Courier New"/>
+              </a:defRPr>
+            </a:pPr>
+            <a:r>
+              <a:rPr sz="1200" b="0">
+                <a:solidFill>
+                  <a:srgbClr val="F8FAFC"/>
+                </a:solidFill>
+                <a:latin typeface="Courier New"/>
+              </a:rPr>
+              <a:t>def xywh_a_xyxy(cx, cy, w, h):</a:t>
+            </a:r>
+          </a:p>
+          <a:p>
+            <a:pPr>
+              <a:defRPr sz="1200" b="0">
+                <a:solidFill>
+                  <a:srgbClr val="F8FAFC"/>
+                </a:solidFill>
+                <a:latin typeface="Courier New"/>
+              </a:defRPr>
+            </a:pPr>
+            <a:r>
+              <a:rPr sz="1200" b="0">
+                <a:solidFill>
+                  <a:srgbClr val="F8FAFC"/>
+                </a:solidFill>
+                <a:latin typeface="Courier New"/>
+              </a:rPr>
+              <a:t>    return np.array([cx - w / 2, cy - h / 2, cx + w / 2, cy + h / 2])</a:t>
+            </a:r>
+          </a:p>
+          <a:p>
+            <a:pPr>
+              <a:defRPr sz="1200" b="0">
+                <a:solidFill>
+                  <a:srgbClr val="F8FAFC"/>
+                </a:solidFill>
+                <a:latin typeface="Courier New"/>
+              </a:defRPr>
+            </a:pPr>
+            <a:r>
+              <a:rPr sz="1200" b="0">
+                <a:solidFill>
+                  <a:srgbClr val="F8FAFC"/>
+                </a:solidFill>
+                <a:latin typeface="Courier New"/>
+              </a:rPr>
+              <a:t> </a:t>
+            </a:r>
+          </a:p>
+          <a:p>
+            <a:pPr>
+              <a:defRPr sz="1200" b="0">
+                <a:solidFill>
+                  <a:srgbClr val="F8FAFC"/>
+                </a:solidFill>
+                <a:latin typeface="Courier New"/>
+              </a:defRPr>
+            </a:pPr>
+            <a:r>
+              <a:rPr sz="1200" b="0">
+                <a:solidFill>
+                  <a:srgbClr val="F8FAFC"/>
+                </a:solidFill>
+                <a:latin typeface="Courier New"/>
+              </a:rPr>
+              <a:t>def xyxy_a_xywh(x1, y1, x2, y2):</a:t>
+            </a:r>
+          </a:p>
+          <a:p>
+            <a:pPr>
+              <a:defRPr sz="1200" b="0">
+                <a:solidFill>
+                  <a:srgbClr val="F8FAFC"/>
+                </a:solidFill>
+                <a:latin typeface="Courier New"/>
+              </a:defRPr>
+            </a:pPr>
+            <a:r>
+              <a:rPr sz="1200" b="0">
+                <a:solidFill>
+                  <a:srgbClr val="F8FAFC"/>
+                </a:solidFill>
+                <a:latin typeface="Courier New"/>
+              </a:rPr>
+              <a:t>    return np.array([(x1 + x2) / 2, (y1 + y2) / 2, x2 - x1, y2 - y1])</a:t>
+            </a:r>
+          </a:p>
+          <a:p>
+            <a:pPr>
+              <a:defRPr sz="1200" b="0">
+                <a:solidFill>
+                  <a:srgbClr val="F8FAFC"/>
+                </a:solidFill>
+                <a:latin typeface="Courier New"/>
+              </a:defRPr>
+            </a:pPr>
+            <a:r>
+              <a:rPr sz="1200" b="0">
+                <a:solidFill>
+                  <a:srgbClr val="F8FAFC"/>
+                </a:solidFill>
+                <a:latin typeface="Courier New"/>
+              </a:rPr>
+              <a:t> </a:t>
+            </a:r>
+          </a:p>
+          <a:p>
+            <a:pPr>
+              <a:defRPr sz="1200" b="0">
+                <a:solidFill>
+                  <a:srgbClr val="F8FAFC"/>
+                </a:solidFill>
+                <a:latin typeface="Courier New"/>
+              </a:defRPr>
+            </a:pPr>
+            <a:r>
+              <a:rPr sz="1200" b="0">
+                <a:solidFill>
+                  <a:srgbClr val="F8FAFC"/>
+                </a:solidFill>
+                <a:latin typeface="Courier New"/>
+              </a:rPr>
+              <a:t>caja = xywh_a_xyxy(50, 50, 20, 30)</a:t>
+            </a:r>
+          </a:p>
+          <a:p>
+            <a:pPr>
+              <a:defRPr sz="1200" b="0">
+                <a:solidFill>
+                  <a:srgbClr val="F8FAFC"/>
+                </a:solidFill>
+                <a:latin typeface="Courier New"/>
+              </a:defRPr>
+            </a:pPr>
+            <a:r>
+              <a:rPr sz="1200" b="0">
+                <a:solidFill>
+                  <a:srgbClr val="F8FAFC"/>
+                </a:solidFill>
+                <a:latin typeface="Courier New"/>
+              </a:rPr>
+              <a:t>print("(cx,cy,w,h)=(50,50,20,30) -&gt; (x1,y1,x2,y2) =", caja)</a:t>
+            </a:r>
+          </a:p>
+          <a:p>
+            <a:pPr>
+              <a:defRPr sz="1200" b="0">
+                <a:solidFill>
+                  <a:srgbClr val="F8FAFC"/>
+                </a:solidFill>
+                <a:latin typeface="Courier New"/>
+              </a:defRPr>
+            </a:pPr>
+            <a:r>
+              <a:rPr sz="1200" b="0">
+                <a:solidFill>
+                  <a:srgbClr val="F8FAFC"/>
+                </a:solidFill>
+                <a:latin typeface="Courier New"/>
+              </a:rPr>
+              <a:t>print("de vuelta a (cx,cy,w,h)   =", xyxy_a_xywh(*caja))</a:t>
             </a:r>
           </a:p>
         </p:txBody>

--- a/classes/parte-2-deep-learning/132-localizacion-deteccion-yolo-faster-r-cnn-segmentacion-semantica/clase-132-localizacion-deteccion-yolo-faster-r-cnn-segmentacion-semantica-presentacion.pptx
+++ b/classes/parte-2-deep-learning/132-localizacion-deteccion-yolo-faster-r-cnn-segmentacion-semantica/clase-132-localizacion-deteccion-yolo-faster-r-cnn-segmentacion-semantica-presentacion.pptx
@@ -3272,7 +3272,7 @@
                 </a:solidFill>
                 <a:latin typeface="Segoe UI"/>
               </a:rPr>
-              <a:t>Parte: 2 — Deep Learning · Fuente: Géron, cap. 14 § Object Detection y § Semantic Segmentation + papers DETR, SAM, YOLOv11.  Duración estimada: 90 min.</a:t>
+              <a:t>Parte: 2 — Deep Learning · Fuente: Géron, cap. 14 § Object Detection y § Semantic Segmentation + papers DETR, SAM, YOLOv11.  Duración estimada: 90 min. · Nivel: Avanzado</a:t>
             </a:r>
           </a:p>
         </p:txBody>
@@ -3581,7 +3581,7 @@
                 </a:solidFill>
                 <a:latin typeface="Segoe UI"/>
               </a:rPr>
-              <a:t>Parte: 2 — Deep Learning · Fuente: Géron, cap. 14 § Object Detection y § Semantic Segmentation + papers DETR, SAM, YOLOv11.  Duración estimada: 90 min.</a:t>
+              <a:t>Parte: 2 — Deep Learning · Fuente: Géron, cap. 14 § Object Detection y § Semantic Segmentation + papers DETR, SAM, YOLOv11.  Duración estimada: 90 min. · Nivel: Avanzado</a:t>
             </a:r>
           </a:p>
         </p:txBody>
